--- a/reports/BRANCH_FLORES_PERFORMANCE_SUMMARY_20260902_INARA.pptx
+++ b/reports/BRANCH_FLORES_PERFORMANCE_SUMMARY_20260902_INARA.pptx
@@ -12495,7 +12495,7 @@
                 </a:solidFill>
                 <a:latin typeface="Arial"/>
               </a:rPr>
-              <a:t>18</a:t>
+              <a:t>19</a:t>
             </a:r>
           </a:p>
         </p:txBody>
@@ -12526,11 +12526,11 @@
             <a:r>
               <a:rPr sz="1200" b="1" i="0">
                 <a:solidFill>
-                  <a:srgbClr val="D73527"/>
+                  <a:srgbClr val="687386"/>
                 </a:solidFill>
                 <a:latin typeface="Arial"/>
               </a:rPr>
-              <a:t>-66,0%</a:t>
+              <a:t>N/A</a:t>
             </a:r>
           </a:p>
         </p:txBody>
@@ -12565,7 +12565,7 @@
                 </a:solidFill>
                 <a:latin typeface="Arial"/>
               </a:rPr>
-              <a:t>MTD-1: 53   Δ -35</a:t>
+              <a:t>MTD-1: 0   Δ 19</a:t>
             </a:r>
           </a:p>
         </p:txBody>
@@ -12682,7 +12682,7 @@
                 </a:solidFill>
                 <a:latin typeface="Arial"/>
               </a:rPr>
-              <a:t>115</a:t>
+              <a:t>141</a:t>
             </a:r>
           </a:p>
         </p:txBody>
@@ -12713,11 +12713,11 @@
             <a:r>
               <a:rPr sz="1200" b="1" i="0">
                 <a:solidFill>
-                  <a:srgbClr val="D73527"/>
+                  <a:srgbClr val="687386"/>
                 </a:solidFill>
                 <a:latin typeface="Arial"/>
               </a:rPr>
-              <a:t>-94,2%</a:t>
+              <a:t>N/A</a:t>
             </a:r>
           </a:p>
         </p:txBody>
@@ -12752,7 +12752,7 @@
                 </a:solidFill>
                 <a:latin typeface="Arial"/>
               </a:rPr>
-              <a:t>MTD-1: 1.991   Δ -1.876</a:t>
+              <a:t>MTD-1: 0   Δ 141</a:t>
             </a:r>
           </a:p>
         </p:txBody>
@@ -13888,7 +13888,7 @@
                           </a:solidFill>
                           <a:latin typeface="Arial"/>
                         </a:rPr>
-                        <a:t>36</a:t>
+                        <a:t>0</a:t>
                       </a:r>
                     </a:p>
                   </a:txBody>
@@ -13978,17 +13978,17 @@
                       <a:r>
                         <a:rPr sz="1050" b="0">
                           <a:solidFill>
-                            <a:srgbClr val="D73527"/>
-                          </a:solidFill>
-                          <a:latin typeface="Arial"/>
-                        </a:rPr>
-                        <a:t>-58,3%</a:t>
-                      </a:r>
-                    </a:p>
-                  </a:txBody>
-                  <a:tcPr marL="27432" marR="27432" marT="0" marB="0">
-                    <a:solidFill>
-                      <a:srgbClr val="FBE9E7"/>
+                            <a:srgbClr val="687386"/>
+                          </a:solidFill>
+                          <a:latin typeface="Arial"/>
+                        </a:rPr>
+                        <a:t>N/A</a:t>
+                      </a:r>
+                    </a:p>
+                  </a:txBody>
+                  <a:tcPr marL="27432" marR="27432" marT="0" marB="0">
+                    <a:solidFill>
+                      <a:srgbClr val="E9EDF2"/>
                     </a:solidFill>
                     <a:lnL w="9000" cap="flat" cmpd="sng" algn="ctr">
                       <a:solidFill>
@@ -14029,7 +14029,7 @@
                           </a:solidFill>
                           <a:latin typeface="Arial"/>
                         </a:rPr>
-                        <a:t>1.294</a:t>
+                        <a:t>0</a:t>
                       </a:r>
                     </a:p>
                   </a:txBody>
@@ -14076,7 +14076,7 @@
                           </a:solidFill>
                           <a:latin typeface="Arial"/>
                         </a:rPr>
-                        <a:t>85</a:t>
+                        <a:t>96</a:t>
                       </a:r>
                     </a:p>
                   </a:txBody>
@@ -14119,17 +14119,17 @@
                       <a:r>
                         <a:rPr sz="1050" b="0">
                           <a:solidFill>
-                            <a:srgbClr val="D73527"/>
-                          </a:solidFill>
-                          <a:latin typeface="Arial"/>
-                        </a:rPr>
-                        <a:t>-93,4%</a:t>
-                      </a:r>
-                    </a:p>
-                  </a:txBody>
-                  <a:tcPr marL="27432" marR="27432" marT="0" marB="0">
-                    <a:solidFill>
-                      <a:srgbClr val="FBE9E7"/>
+                            <a:srgbClr val="687386"/>
+                          </a:solidFill>
+                          <a:latin typeface="Arial"/>
+                        </a:rPr>
+                        <a:t>N/A</a:t>
+                      </a:r>
+                    </a:p>
+                  </a:txBody>
+                  <a:tcPr marL="27432" marR="27432" marT="0" marB="0">
+                    <a:solidFill>
+                      <a:srgbClr val="E9EDF2"/>
                     </a:solidFill>
                     <a:lnL w="9000" cap="flat" cmpd="sng" algn="ctr">
                       <a:solidFill>
@@ -14548,7 +14548,7 @@
                           </a:solidFill>
                           <a:latin typeface="Arial"/>
                         </a:rPr>
-                        <a:t>17</a:t>
+                        <a:t>0</a:t>
                       </a:r>
                     </a:p>
                   </a:txBody>
@@ -14595,7 +14595,7 @@
                           </a:solidFill>
                           <a:latin typeface="Arial"/>
                         </a:rPr>
-                        <a:t>3</a:t>
+                        <a:t>4</a:t>
                       </a:r>
                     </a:p>
                   </a:txBody>
@@ -14638,17 +14638,17 @@
                       <a:r>
                         <a:rPr sz="1050" b="0">
                           <a:solidFill>
-                            <a:srgbClr val="D73527"/>
-                          </a:solidFill>
-                          <a:latin typeface="Arial"/>
-                        </a:rPr>
-                        <a:t>-82,4%</a:t>
-                      </a:r>
-                    </a:p>
-                  </a:txBody>
-                  <a:tcPr marL="27432" marR="27432" marT="0" marB="0">
-                    <a:solidFill>
-                      <a:srgbClr val="FBE9E7"/>
+                            <a:srgbClr val="687386"/>
+                          </a:solidFill>
+                          <a:latin typeface="Arial"/>
+                        </a:rPr>
+                        <a:t>N/A</a:t>
+                      </a:r>
+                    </a:p>
+                  </a:txBody>
+                  <a:tcPr marL="27432" marR="27432" marT="0" marB="0">
+                    <a:solidFill>
+                      <a:srgbClr val="E9EDF2"/>
                     </a:solidFill>
                     <a:lnL w="9000" cap="flat" cmpd="sng" algn="ctr">
                       <a:solidFill>
@@ -14689,7 +14689,7 @@
                           </a:solidFill>
                           <a:latin typeface="Arial"/>
                         </a:rPr>
-                        <a:t>697</a:t>
+                        <a:t>0</a:t>
                       </a:r>
                     </a:p>
                   </a:txBody>
@@ -14736,7 +14736,7 @@
                           </a:solidFill>
                           <a:latin typeface="Arial"/>
                         </a:rPr>
-                        <a:t>30</a:t>
+                        <a:t>45</a:t>
                       </a:r>
                     </a:p>
                   </a:txBody>
@@ -14779,17 +14779,17 @@
                       <a:r>
                         <a:rPr sz="1050" b="0">
                           <a:solidFill>
-                            <a:srgbClr val="D73527"/>
-                          </a:solidFill>
-                          <a:latin typeface="Arial"/>
-                        </a:rPr>
-                        <a:t>-95,7%</a:t>
-                      </a:r>
-                    </a:p>
-                  </a:txBody>
-                  <a:tcPr marL="27432" marR="27432" marT="0" marB="0">
-                    <a:solidFill>
-                      <a:srgbClr val="FBE9E7"/>
+                            <a:srgbClr val="687386"/>
+                          </a:solidFill>
+                          <a:latin typeface="Arial"/>
+                        </a:rPr>
+                        <a:t>N/A</a:t>
+                      </a:r>
+                    </a:p>
+                  </a:txBody>
+                  <a:tcPr marL="27432" marR="27432" marT="0" marB="0">
+                    <a:solidFill>
+                      <a:srgbClr val="E9EDF2"/>
                     </a:solidFill>
                     <a:lnL w="9000" cap="flat" cmpd="sng" algn="ctr">
                       <a:solidFill>
@@ -22943,7 +22943,7 @@
                 </a:solidFill>
                 <a:latin typeface="Arial"/>
               </a:rPr>
-              <a:t>136</a:t>
+              <a:t>145</a:t>
             </a:r>
           </a:p>
         </p:txBody>
@@ -23165,7 +23165,7 @@
                 </a:solidFill>
                 <a:latin typeface="Arial"/>
               </a:rPr>
-              <a:t>127</a:t>
+              <a:t>130</a:t>
             </a:r>
           </a:p>
         </p:txBody>
